--- a/practice-en/lab-2-administrative-documents.pptx
+++ b/practice-en/lab-2-administrative-documents.pptx
@@ -511,17 +511,17 @@
           <a:lstStyle/>
           <a:p>
             <a:r>
-              <a:t>MỞ ĐẦU (3 phút)</a:t>
-            </a:r>
-          </a:p>
-          <a:p>
-            <a:r>
-              <a:t>• Trả bài số 1, nêu 3 lỗi phổ biến nhất của cả lớp (không nêu tên ai).</a:t>
-            </a:r>
-          </a:p>
-          <a:p>
-            <a:r>
-              <a:t>• Nhấn: buổi này giữ nguyên yêu cầu thể thức của Bài 1, cộng thêm BỐ CỤC từng loại văn bản.</a:t>
+              <a:t>OPENING (3 minutes)</a:t>
+            </a:r>
+          </a:p>
+          <a:p>
+            <a:r>
+              <a:t>• Hand back Lab 1 and name the three faults the class made most often (no names of students).</a:t>
+            </a:r>
+          </a:p>
+          <a:p>
+            <a:r>
+              <a:t>• Press: today keeps every format requirement from Lab 1 and adds the STRUCTURE of each document type.</a:t>
             </a:r>
           </a:p>
         </p:txBody>
@@ -607,7 +607,7 @@
           <a:lstStyle/>
           <a:p>
             <a:r>
-              <a:t>TIÊU CHÍ CHẤM (2 phút) — nhắc lại 3 tiêu chí.</a:t>
+              <a:t>MARKING CRITERIA (2 minutes) — restate the three criteria.</a:t>
             </a:r>
           </a:p>
         </p:txBody>
@@ -693,7 +693,7 @@
           <a:lstStyle/>
           <a:p>
             <a:r>
-              <a:t>KẾT BUỔI (1 phút) — buổi sau làm theo cặp, nhắc sinh viên tự ghép cặp trước.</a:t>
+              <a:t>CLOSING (1 minute) — next session is in pairs; tell students to pair up beforehand.</a:t>
             </a:r>
           </a:p>
         </p:txBody>
@@ -779,7 +779,7 @@
           <a:lstStyle/>
           <a:p>
             <a:r>
-              <a:t>MỤC TIÊU (2 phút) — 4 mục tiêu; nhấn: mỗi bạn sẽ soạn 2 văn bản bốc thăm.</a:t>
+              <a:t>OBJECTIVES (2 minutes) — four of them; press it: everyone drafts two documents, drawn by lot.</a:t>
             </a:r>
           </a:p>
         </p:txBody>
@@ -865,7 +865,7 @@
           <a:lstStyle/>
           <a:p>
             <a:r>
-              <a:t>NỘI DUNG (1 phút) — 5 loại văn bản.</a:t>
+              <a:t>CONTENTS (1 minute) — five document types.</a:t>
             </a:r>
           </a:p>
         </p:txBody>
@@ -951,7 +951,7 @@
           <a:lstStyle/>
           <a:p>
             <a:r>
-              <a:t>QUY TRÌNH (2 phút) — nhấn bước phân tích văn bản mẫu trước khi soạn.</a:t>
+              <a:t>THE PROCEDURE (2 minutes) — press the step of analysing the specimen before drafting.</a:t>
             </a:r>
           </a:p>
         </p:txBody>
@@ -1037,27 +1037,27 @@
           <a:lstStyle/>
           <a:p>
             <a:r>
-              <a:t>QUYẾT ĐỊNH (10 phút)</a:t>
-            </a:r>
-          </a:p>
-          <a:p>
-            <a:r>
-              <a:t>• Chiếu văn bản mẫu, cho lớp CHỈ RA phần căn cứ và phần các Điều.</a:t>
-            </a:r>
-          </a:p>
-          <a:p>
-            <a:r>
-              <a:t>• Cô gõ mẫu phần căn cứ trên máy chiếu, nói to từng dòng.</a:t>
-            </a:r>
-          </a:p>
-          <a:p>
-            <a:r>
-              <a:t>• Nhấn dấu câu: căn cứ kết thúc bằng DẤU CHẤM PHẨY, dòng cuối DẤU CHẤM.</a:t>
-            </a:r>
-          </a:p>
-          <a:p>
-            <a:r>
-              <a:t>• Đọc to danh sách lỗi thường gặp cuối slide — bảo sinh viên đánh dấu vào vở.</a:t>
+              <a:t>THE DECISION (10 minutes)</a:t>
+            </a:r>
+          </a:p>
+          <a:p>
+            <a:r>
+              <a:t>• Put the specimen up and have the class POINT OUT the recitals and the articles.</a:t>
+            </a:r>
+          </a:p>
+          <a:p>
+            <a:r>
+              <a:t>• Type the recitals yourself on the projector, saying each line aloud.</a:t>
+            </a:r>
+          </a:p>
+          <a:p>
+            <a:r>
+              <a:t>• Press the punctuation: each recital ends in a SEMICOLON, the last in a FULL STOP.</a:t>
+            </a:r>
+          </a:p>
+          <a:p>
+            <a:r>
+              <a:t>• Read out the list of common faults at the foot of the slide — tell students to mark them in their notebooks.</a:t>
             </a:r>
           </a:p>
         </p:txBody>
@@ -1143,22 +1143,22 @@
           <a:lstStyle/>
           <a:p>
             <a:r>
-              <a:t>TỜ TRÌNH (8 phút)</a:t>
-            </a:r>
-          </a:p>
-          <a:p>
-            <a:r>
-              <a:t>• Phân tích mẫu theo 3 phần.</a:t>
-            </a:r>
-          </a:p>
-          <a:p>
-            <a:r>
-              <a:t>• Cho lớp thử viết 2 câu mở đầu tờ trình cho tình huống mua máy tính, gọi 2 bạn đọc lên.</a:t>
-            </a:r>
-          </a:p>
-          <a:p>
-            <a:r>
-              <a:t>• Nhấn: phải có số liệu và dự toán kèm theo.</a:t>
+              <a:t>THE SUBMISSION (8 minutes)</a:t>
+            </a:r>
+          </a:p>
+          <a:p>
+            <a:r>
+              <a:t>• Analyse the specimen in its three parts.</a:t>
+            </a:r>
+          </a:p>
+          <a:p>
+            <a:r>
+              <a:t>• Have the class write two opening sentences of a submission for the computer-purchase case, then call on two to read them out.</a:t>
+            </a:r>
+          </a:p>
+          <a:p>
+            <a:r>
+              <a:t>• Press: it must come with figures and a cost estimate attached.</a:t>
             </a:r>
           </a:p>
         </p:txBody>
@@ -1244,22 +1244,22 @@
           <a:lstStyle/>
           <a:p>
             <a:r>
-              <a:t>CÔNG VĂN (10 phút)</a:t>
-            </a:r>
-          </a:p>
-          <a:p>
-            <a:r>
-              <a:t>• Chiếu song song một công văn ĐÚNG và một công văn SAI (có ghi thêm chữ "CÔNG VĂN" ở giữa) — cho lớp tìm lỗi.</a:t>
-            </a:r>
-          </a:p>
-          <a:p>
-            <a:r>
-              <a:t>• Làm mẫu câu mở đầu công văn phúc đáp.</a:t>
-            </a:r>
-          </a:p>
-          <a:p>
-            <a:r>
-              <a:t>• Nhấn: mỗi công văn MỘT chủ đề; kết thúc "Trân trọng./."''</a:t>
+              <a:t>THE OFFICIAL LETTER (10 minutes)</a:t>
+            </a:r>
+          </a:p>
+          <a:p>
+            <a:r>
+              <a:t>• Put a CORRECT and an INCORRECT official letter side by side (the wrong one has "OFFICIAL LETTER" typed in the middle) — have the class find the fault.</a:t>
+            </a:r>
+          </a:p>
+          <a:p>
+            <a:r>
+              <a:t>• Demonstrate the opening sentence of a letter of reply.</a:t>
+            </a:r>
+          </a:p>
+          <a:p>
+            <a:r>
+              <a:t>• Press: ONE subject per letter; it closes with "Yours faithfully./."''</a:t>
             </a:r>
           </a:p>
         </p:txBody>
@@ -1345,22 +1345,22 @@
           <a:lstStyle/>
           <a:p>
             <a:r>
-              <a:t>BIÊN BẢN – BÁO CÁO (10 phút)</a:t>
-            </a:r>
-          </a:p>
-          <a:p>
-            <a:r>
-              <a:t>• Biên bản: nhấn LẬP TẠI CHỖ và CHỮ KÝ hai bên.</a:t>
-            </a:r>
-          </a:p>
-          <a:p>
-            <a:r>
-              <a:t>• Cho lớp thử: cô đọc một đoạn hội thoại họp ngắn, sinh viên ghi biên bản trong 3 phút, rồi so sánh vài bài.</a:t>
-            </a:r>
-          </a:p>
-          <a:p>
-            <a:r>
-              <a:t>• Báo cáo: nhấn phải nêu cả hạn chế; số liệu phải nhất quán giữa các phần.</a:t>
+              <a:t>MINUTES AND REPORTS (10 minutes)</a:t>
+            </a:r>
+          </a:p>
+          <a:p>
+            <a:r>
+              <a:t>• Minutes: press WRITTEN ON THE SPOT and SIGNED by both parties.</a:t>
+            </a:r>
+          </a:p>
+          <a:p>
+            <a:r>
+              <a:t>• Try it live: read out a short passage of meeting dialogue, students write the minutes in 3 minutes, then compare a few.</a:t>
+            </a:r>
+          </a:p>
+          <a:p>
+            <a:r>
+              <a:t>• Reports: press that the shortcomings must appear too; the figures must agree between sections.</a:t>
             </a:r>
           </a:p>
         </p:txBody>

--- a/practice-en/lab-2-administrative-documents.pptx
+++ b/practice-en/lab-2-administrative-documents.pptx
@@ -1446,10 +1446,28 @@
           <a:lstStyle/>
           <a:p>
             <a:r>
-              <a:rPr lang="en-US" dirty="0"/>
-              <a:t/>
-            </a:r>
-            <a:endParaRPr lang="en-US" dirty="0"/>
+              <a:t>THE EXERCISE (30 minutes)</a:t>
+            </a:r>
+          </a:p>
+          <a:p>
+            <a:r>
+              <a:t>• The draw: have the slips ready, two document types on each.</a:t>
+            </a:r>
+          </a:p>
+          <a:p>
+            <a:r>
+              <a:t>• Remind them to reuse the eight-point checklist from Lab 1.</a:t>
+            </a:r>
+          </a:p>
+          <a:p>
+            <a:r>
+              <a:t>• Walk the room; help first whoever drew the decision and the minutes (the hardest two).</a:t>
+            </a:r>
+          </a:p>
+          <a:p>
+            <a:r>
+              <a:t>• End of session: collect the work, remind them the revised version is due in a week.</a:t>
+            </a:r>
           </a:p>
         </p:txBody>
       </p:sp>
